--- a/data-eng/decks/w2d4s3.pptx
+++ b/data-eng/decks/w2d4s3.pptx
@@ -3100,7 +3100,7 @@
       <p:grpSpPr/>
       <p:sp>
         <p:nvSpPr>
-          <p:cNvPr id="2" name="Oval 1"/>
+          <p:cNvPr id="2" name="deckgen:decor"/>
           <p:cNvSpPr/>
           <p:nvPr/>
         </p:nvSpPr>
@@ -3130,7 +3130,7 @@
       </p:sp>
       <p:sp>
         <p:nvSpPr>
-          <p:cNvPr id="3" name="Oval 2"/>
+          <p:cNvPr id="3" name="deckgen:decor"/>
           <p:cNvSpPr/>
           <p:nvPr/>
         </p:nvSpPr>
@@ -3160,7 +3160,7 @@
       </p:sp>
       <p:sp>
         <p:nvSpPr>
-          <p:cNvPr id="4" name="Oval 3"/>
+          <p:cNvPr id="4" name="deckgen:decor"/>
           <p:cNvSpPr/>
           <p:nvPr/>
         </p:nvSpPr>
@@ -3190,7 +3190,7 @@
       </p:sp>
       <p:sp>
         <p:nvSpPr>
-          <p:cNvPr id="5" name="Rectangle 4"/>
+          <p:cNvPr id="5" name="deckgen:decor"/>
           <p:cNvSpPr/>
           <p:nvPr/>
         </p:nvSpPr>
@@ -3220,7 +3220,7 @@
       </p:sp>
       <p:sp>
         <p:nvSpPr>
-          <p:cNvPr id="6" name="Oval 5"/>
+          <p:cNvPr id="6" name="deckgen:decor"/>
           <p:cNvSpPr/>
           <p:nvPr/>
         </p:nvSpPr>
@@ -3250,7 +3250,7 @@
       </p:sp>
       <p:sp>
         <p:nvSpPr>
-          <p:cNvPr id="7" name="Oval 6"/>
+          <p:cNvPr id="7" name="deckgen:decor"/>
           <p:cNvSpPr/>
           <p:nvPr/>
         </p:nvSpPr>
@@ -3280,7 +3280,7 @@
       </p:sp>
       <p:sp>
         <p:nvSpPr>
-          <p:cNvPr id="8" name="Oval 7"/>
+          <p:cNvPr id="8" name="deckgen:decor"/>
           <p:cNvSpPr/>
           <p:nvPr/>
         </p:nvSpPr>
@@ -3310,7 +3310,7 @@
       </p:sp>
       <p:sp>
         <p:nvSpPr>
-          <p:cNvPr id="9" name="Oval 8"/>
+          <p:cNvPr id="9" name="deckgen:decor"/>
           <p:cNvSpPr/>
           <p:nvPr/>
         </p:nvSpPr>
@@ -3340,7 +3340,7 @@
       </p:sp>
       <p:sp>
         <p:nvSpPr>
-          <p:cNvPr id="10" name="Rectangle 9"/>
+          <p:cNvPr id="10" name="deckgen:decor"/>
           <p:cNvSpPr/>
           <p:nvPr/>
         </p:nvSpPr>
@@ -3600,7 +3600,7 @@
       <p:grpSpPr/>
       <p:sp>
         <p:nvSpPr>
-          <p:cNvPr id="2" name="Oval 1"/>
+          <p:cNvPr id="2" name="deckgen:decor"/>
           <p:cNvSpPr/>
           <p:nvPr/>
         </p:nvSpPr>
@@ -3630,7 +3630,7 @@
       </p:sp>
       <p:sp>
         <p:nvSpPr>
-          <p:cNvPr id="3" name="Oval 2"/>
+          <p:cNvPr id="3" name="deckgen:decor"/>
           <p:cNvSpPr/>
           <p:nvPr/>
         </p:nvSpPr>
@@ -3660,7 +3660,7 @@
       </p:sp>
       <p:sp>
         <p:nvSpPr>
-          <p:cNvPr id="4" name="Oval 3"/>
+          <p:cNvPr id="4" name="deckgen:decor"/>
           <p:cNvSpPr/>
           <p:nvPr/>
         </p:nvSpPr>
@@ -4817,7 +4817,7 @@
                 <a:ea typeface="Pretendard"/>
                 <a:cs typeface="Pretendard"/>
               </a:rPr>
-              <a:t>DROP TABLE bad_orders 뒤 다섯 표가 남았다 — 2-5 크롤러에서 쓴다</a:t>
+              <a:t>DROP TABLE bad_orders 뒤 다섯 표 — 컨테이너·표는 그대로 둔다</a:t>
             </a:r>
           </a:p>
         </p:txBody>
@@ -4954,7 +4954,7 @@
       <p:grpSpPr/>
       <p:sp>
         <p:nvSpPr>
-          <p:cNvPr id="2" name="Oval 1"/>
+          <p:cNvPr id="2" name="deckgen:decor"/>
           <p:cNvSpPr/>
           <p:nvPr/>
         </p:nvSpPr>
@@ -4984,7 +4984,7 @@
       </p:sp>
       <p:sp>
         <p:nvSpPr>
-          <p:cNvPr id="3" name="Oval 2"/>
+          <p:cNvPr id="3" name="deckgen:decor"/>
           <p:cNvSpPr/>
           <p:nvPr/>
         </p:nvSpPr>
@@ -5160,7 +5160,7 @@
                 <a:ea typeface="Pretendard"/>
                 <a:cs typeface="Pretendard"/>
               </a:rPr>
-              <a:t>ERD 설계서 초안에 무엇이 들어가야 하는지 확인하고, 옆 사람과 ERD 를 바꿔 읽습니다</a:t>
+              <a:t>ERD 설계서 초안에 무엇이 들어가야 하는지 확인하고, 소회의실에서 서로의 ERD 를 화면 공유로 읽습니다</a:t>
             </a:r>
           </a:p>
         </p:txBody>
@@ -5624,7 +5624,7 @@
                 <a:ea typeface="Pretendard"/>
                 <a:cs typeface="Pretendard"/>
               </a:rPr>
-              <a:t>자주 겪는 오류 1824·3780·1451</a:t>
+              <a:t>자주 겪는 오류 1824·3780·3730·1451</a:t>
             </a:r>
           </a:p>
         </p:txBody>
@@ -5761,7 +5761,7 @@
       <p:grpSpPr/>
       <p:sp>
         <p:nvSpPr>
-          <p:cNvPr id="2" name="Oval 1"/>
+          <p:cNvPr id="2" name="deckgen:decor"/>
           <p:cNvSpPr/>
           <p:nvPr/>
         </p:nvSpPr>
@@ -5791,7 +5791,7 @@
       </p:sp>
       <p:sp>
         <p:nvSpPr>
-          <p:cNvPr id="3" name="Oval 2"/>
+          <p:cNvPr id="3" name="deckgen:decor"/>
           <p:cNvSpPr/>
           <p:nvPr/>
         </p:nvSpPr>
@@ -5821,7 +5821,7 @@
       </p:sp>
       <p:sp>
         <p:nvSpPr>
-          <p:cNvPr id="4" name="Oval 3"/>
+          <p:cNvPr id="4" name="deckgen:decor"/>
           <p:cNvSpPr/>
           <p:nvPr/>
         </p:nvSpPr>
@@ -6752,7 +6752,7 @@
       <p:grpSpPr/>
       <p:sp>
         <p:nvSpPr>
-          <p:cNvPr id="2" name="Oval 1"/>
+          <p:cNvPr id="2" name="deckgen:decor"/>
           <p:cNvSpPr/>
           <p:nvPr/>
         </p:nvSpPr>
@@ -6782,7 +6782,7 @@
       </p:sp>
       <p:sp>
         <p:nvSpPr>
-          <p:cNvPr id="3" name="Oval 2"/>
+          <p:cNvPr id="3" name="deckgen:decor"/>
           <p:cNvSpPr/>
           <p:nvPr/>
         </p:nvSpPr>
@@ -6812,7 +6812,7 @@
       </p:sp>
       <p:sp>
         <p:nvSpPr>
-          <p:cNvPr id="4" name="Oval 3"/>
+          <p:cNvPr id="4" name="deckgen:decor"/>
           <p:cNvSpPr/>
           <p:nvPr/>
         </p:nvSpPr>
@@ -7945,7 +7945,7 @@
       <p:grpSpPr/>
       <p:sp>
         <p:nvSpPr>
-          <p:cNvPr id="2" name="Oval 1"/>
+          <p:cNvPr id="2" name="deckgen:decor"/>
           <p:cNvSpPr/>
           <p:nvPr/>
         </p:nvSpPr>
@@ -7975,7 +7975,7 @@
       </p:sp>
       <p:sp>
         <p:nvSpPr>
-          <p:cNvPr id="3" name="Oval 2"/>
+          <p:cNvPr id="3" name="deckgen:decor"/>
           <p:cNvSpPr/>
           <p:nvPr/>
         </p:nvSpPr>
@@ -8005,7 +8005,7 @@
       </p:sp>
       <p:sp>
         <p:nvSpPr>
-          <p:cNvPr id="4" name="Oval 3"/>
+          <p:cNvPr id="4" name="deckgen:decor"/>
           <p:cNvSpPr/>
           <p:nvPr/>
         </p:nvSpPr>
@@ -9332,7 +9332,268 @@
       </p:sp>
       <p:sp>
         <p:nvSpPr>
-          <p:cNvPr id="38" name="TextBox 37"/>
+          <p:cNvPr id="38" name="Rounded Rectangle 37"/>
+          <p:cNvSpPr/>
+          <p:nvPr/>
+        </p:nvSpPr>
+        <p:spPr>
+          <a:xfrm>
+            <a:off x="1143000" y="6343650"/>
+            <a:ext cx="3482340" cy="647700"/>
+          </a:xfrm>
+          <a:prstGeom prst="roundRect">
+            <a:avLst>
+              <a:gd name="adj" fmla="val 5882"/>
+            </a:avLst>
+          </a:prstGeom>
+          <a:solidFill>
+            <a:srgbClr val="EDF3FD"/>
+          </a:solidFill>
+          <a:ln w="9525">
+            <a:solidFill>
+              <a:srgbClr val="BFD3F5"/>
+            </a:solidFill>
+          </a:ln>
+          <a:effectLst/>
+        </p:spPr>
+        <p:txBody>
+          <a:bodyPr rtlCol="0" anchor="ctr" wrap="square"/>
+          <a:lstStyle/>
+          <a:p>
+            <a:pPr algn="ctr"/>
+          </a:p>
+        </p:txBody>
+      </p:sp>
+      <p:sp>
+        <p:nvSpPr>
+          <p:cNvPr id="39" name="TextBox 38"/>
+          <p:cNvSpPr txBox="1"/>
+          <p:nvPr/>
+        </p:nvSpPr>
+        <p:spPr>
+          <a:xfrm>
+            <a:off x="1238250" y="6343650"/>
+            <a:ext cx="3291840" cy="647700"/>
+          </a:xfrm>
+          <a:prstGeom prst="rect">
+            <a:avLst/>
+          </a:prstGeom>
+          <a:noFill/>
+        </p:spPr>
+        <p:txBody>
+          <a:bodyPr wrap="square" lIns="0" rIns="0" tIns="0" bIns="0" anchor="ctr">
+            <a:spAutoFit/>
+          </a:bodyPr>
+          <a:lstStyle/>
+          <a:p>
+            <a:pPr algn="l">
+              <a:lnSpc>
+                <a:spcPct val="115000"/>
+              </a:lnSpc>
+            </a:pPr>
+            <a:r>
+              <a:rPr sz="1875" b="1">
+                <a:solidFill>
+                  <a:srgbClr val="0D2B5E"/>
+                </a:solidFill>
+                <a:latin typeface="Pretendard"/>
+                <a:ea typeface="Pretendard"/>
+                <a:cs typeface="Pretendard"/>
+              </a:rPr>
+              <a:t>orders 가 이미 있다면</a:t>
+            </a:r>
+          </a:p>
+        </p:txBody>
+      </p:sp>
+      <p:sp>
+        <p:nvSpPr>
+          <p:cNvPr id="40" name="Rounded Rectangle 39"/>
+          <p:cNvSpPr/>
+          <p:nvPr/>
+        </p:nvSpPr>
+        <p:spPr>
+          <a:xfrm>
+            <a:off x="4663440" y="6343650"/>
+            <a:ext cx="7002780" cy="647700"/>
+          </a:xfrm>
+          <a:prstGeom prst="roundRect">
+            <a:avLst>
+              <a:gd name="adj" fmla="val 5882"/>
+            </a:avLst>
+          </a:prstGeom>
+          <a:solidFill>
+            <a:srgbClr val="FAFBFD"/>
+          </a:solidFill>
+          <a:ln w="9525">
+            <a:solidFill>
+              <a:srgbClr val="DCE1E8"/>
+            </a:solidFill>
+          </a:ln>
+          <a:effectLst/>
+        </p:spPr>
+        <p:txBody>
+          <a:bodyPr rtlCol="0" anchor="ctr" wrap="square"/>
+          <a:lstStyle/>
+          <a:p>
+            <a:pPr algn="ctr"/>
+          </a:p>
+        </p:txBody>
+      </p:sp>
+      <p:sp>
+        <p:nvSpPr>
+          <p:cNvPr id="41" name="TextBox 40"/>
+          <p:cNvSpPr txBox="1"/>
+          <p:nvPr/>
+        </p:nvSpPr>
+        <p:spPr>
+          <a:xfrm>
+            <a:off x="4758690" y="6343650"/>
+            <a:ext cx="6812280" cy="647700"/>
+          </a:xfrm>
+          <a:prstGeom prst="rect">
+            <a:avLst/>
+          </a:prstGeom>
+          <a:noFill/>
+        </p:spPr>
+        <p:txBody>
+          <a:bodyPr wrap="square" lIns="0" rIns="0" tIns="0" bIns="0" anchor="ctr">
+            <a:spAutoFit/>
+          </a:bodyPr>
+          <a:lstStyle/>
+          <a:p>
+            <a:pPr algn="ctr">
+              <a:lnSpc>
+                <a:spcPct val="115000"/>
+              </a:lnSpc>
+            </a:pPr>
+            <a:r>
+              <a:rPr sz="1875" b="0">
+                <a:solidFill>
+                  <a:srgbClr val="3D3D3D"/>
+                </a:solidFill>
+                <a:latin typeface="Pretendard"/>
+                <a:ea typeface="Pretendard"/>
+                <a:cs typeface="Pretendard"/>
+              </a:rPr>
+              <a:t>ERROR 1050 → 이어서</a:t>
+            </a:r>
+          </a:p>
+          <a:p>
+            <a:pPr algn="ctr">
+              <a:lnSpc>
+                <a:spcPct val="115000"/>
+              </a:lnSpc>
+            </a:pPr>
+            <a:r>
+              <a:rPr sz="1875" b="0">
+                <a:solidFill>
+                  <a:srgbClr val="3D3D3D"/>
+                </a:solidFill>
+                <a:latin typeface="Pretendard"/>
+                <a:ea typeface="Pretendard"/>
+                <a:cs typeface="Pretendard"/>
+              </a:rPr>
+              <a:t>ERROR 3734</a:t>
+            </a:r>
+          </a:p>
+        </p:txBody>
+      </p:sp>
+      <p:sp>
+        <p:nvSpPr>
+          <p:cNvPr id="42" name="Rounded Rectangle 41"/>
+          <p:cNvSpPr/>
+          <p:nvPr/>
+        </p:nvSpPr>
+        <p:spPr>
+          <a:xfrm>
+            <a:off x="11704320" y="6343650"/>
+            <a:ext cx="5440680" cy="647700"/>
+          </a:xfrm>
+          <a:prstGeom prst="roundRect">
+            <a:avLst>
+              <a:gd name="adj" fmla="val 5882"/>
+            </a:avLst>
+          </a:prstGeom>
+          <a:solidFill>
+            <a:srgbClr val="FAFBFD"/>
+          </a:solidFill>
+          <a:ln w="9525">
+            <a:solidFill>
+              <a:srgbClr val="DCE1E8"/>
+            </a:solidFill>
+          </a:ln>
+          <a:effectLst/>
+        </p:spPr>
+        <p:txBody>
+          <a:bodyPr rtlCol="0" anchor="ctr" wrap="square"/>
+          <a:lstStyle/>
+          <a:p>
+            <a:pPr algn="ctr"/>
+          </a:p>
+        </p:txBody>
+      </p:sp>
+      <p:sp>
+        <p:nvSpPr>
+          <p:cNvPr id="43" name="TextBox 42"/>
+          <p:cNvSpPr txBox="1"/>
+          <p:nvPr/>
+        </p:nvSpPr>
+        <p:spPr>
+          <a:xfrm>
+            <a:off x="11799570" y="6343650"/>
+            <a:ext cx="5250180" cy="647700"/>
+          </a:xfrm>
+          <a:prstGeom prst="rect">
+            <a:avLst/>
+          </a:prstGeom>
+          <a:noFill/>
+        </p:spPr>
+        <p:txBody>
+          <a:bodyPr wrap="square" lIns="0" rIns="0" tIns="0" bIns="0" anchor="ctr">
+            <a:spAutoFit/>
+          </a:bodyPr>
+          <a:lstStyle/>
+          <a:p>
+            <a:pPr algn="ctr">
+              <a:lnSpc>
+                <a:spcPct val="115000"/>
+              </a:lnSpc>
+            </a:pPr>
+            <a:r>
+              <a:rPr sz="1875" b="0">
+                <a:solidFill>
+                  <a:srgbClr val="3D3D3D"/>
+                </a:solidFill>
+                <a:latin typeface="Pretendard"/>
+                <a:ea typeface="Pretendard"/>
+                <a:cs typeface="Pretendard"/>
+              </a:rPr>
+              <a:t>실습점검 4단계로</a:t>
+            </a:r>
+          </a:p>
+          <a:p>
+            <a:pPr algn="ctr">
+              <a:lnSpc>
+                <a:spcPct val="115000"/>
+              </a:lnSpc>
+            </a:pPr>
+            <a:r>
+              <a:rPr sz="1875" b="0">
+                <a:solidFill>
+                  <a:srgbClr val="3D3D3D"/>
+                </a:solidFill>
+                <a:latin typeface="Pretendard"/>
+                <a:ea typeface="Pretendard"/>
+                <a:cs typeface="Pretendard"/>
+              </a:rPr>
+              <a:t>지우고 다시</a:t>
+            </a:r>
+          </a:p>
+        </p:txBody>
+      </p:sp>
+      <p:sp>
+        <p:nvSpPr>
+          <p:cNvPr id="44" name="TextBox 43"/>
           <p:cNvSpPr txBox="1"/>
           <p:nvPr/>
         </p:nvSpPr>
@@ -9366,14 +9627,14 @@
                 <a:ea typeface="Pretendard"/>
                 <a:cs typeface="Pretendard"/>
               </a:rPr>
-              <a:t>확인 포인트: SHOW TABLES 에 여섯 표 — products·monthly_sales·bad_orders + customers·orders·order_items</a:t>
-            </a:r>
-          </a:p>
-        </p:txBody>
-      </p:sp>
-      <p:sp>
-        <p:nvSpPr>
-          <p:cNvPr id="39" name="Rectangle 38"/>
+              <a:t>확인 포인트: SHOW TABLES 에 여섯 표(이름순) — bad_orders·customers·monthly_sales·order_items·orders·products</a:t>
+            </a:r>
+          </a:p>
+        </p:txBody>
+      </p:sp>
+      <p:sp>
+        <p:nvSpPr>
+          <p:cNvPr id="45" name="Rectangle 44"/>
           <p:cNvSpPr/>
           <p:nvPr/>
         </p:nvSpPr>
@@ -9403,7 +9664,7 @@
       </p:sp>
       <p:sp>
         <p:nvSpPr>
-          <p:cNvPr id="40" name="TextBox 39"/>
+          <p:cNvPr id="46" name="TextBox 45"/>
           <p:cNvSpPr txBox="1"/>
           <p:nvPr/>
         </p:nvSpPr>
@@ -9444,7 +9705,7 @@
       </p:sp>
       <p:sp>
         <p:nvSpPr>
-          <p:cNvPr id="41" name="TextBox 40"/>
+          <p:cNvPr id="47" name="TextBox 46"/>
           <p:cNvSpPr txBox="1"/>
           <p:nvPr/>
         </p:nvSpPr>
@@ -9503,7 +9764,7 @@
       <p:grpSpPr/>
       <p:sp>
         <p:nvSpPr>
-          <p:cNvPr id="2" name="Oval 1"/>
+          <p:cNvPr id="2" name="deckgen:decor"/>
           <p:cNvSpPr/>
           <p:nvPr/>
         </p:nvSpPr>
@@ -9533,7 +9794,7 @@
       </p:sp>
       <p:sp>
         <p:nvSpPr>
-          <p:cNvPr id="3" name="Oval 2"/>
+          <p:cNvPr id="3" name="deckgen:decor"/>
           <p:cNvSpPr/>
           <p:nvPr/>
         </p:nvSpPr>
@@ -9563,7 +9824,7 @@
       </p:sp>
       <p:sp>
         <p:nvSpPr>
-          <p:cNvPr id="4" name="Oval 3"/>
+          <p:cNvPr id="4" name="deckgen:decor"/>
           <p:cNvSpPr/>
           <p:nvPr/>
         </p:nvSpPr>
@@ -10464,7 +10725,7 @@
                 <a:ea typeface="Pretendard"/>
                 <a:cs typeface="Pretendard"/>
               </a:rPr>
-              <a:t>product_id 2·3·4 는 2-1 에서 넣은 무선 마우스·기계식 키보드·텀블러</a:t>
+              <a:t>product_id 2·3·4 = 무선 마우스·기계식 키보드·텀블러 · INSERT 묶음은 한 번만(두 번이면 고객·주문이 중복)</a:t>
             </a:r>
           </a:p>
         </p:txBody>
@@ -10601,7 +10862,7 @@
       <p:grpSpPr/>
       <p:sp>
         <p:nvSpPr>
-          <p:cNvPr id="2" name="Oval 1"/>
+          <p:cNvPr id="2" name="deckgen:decor"/>
           <p:cNvSpPr/>
           <p:nvPr/>
         </p:nvSpPr>
@@ -10631,7 +10892,7 @@
       </p:sp>
       <p:sp>
         <p:nvSpPr>
-          <p:cNvPr id="3" name="Oval 2"/>
+          <p:cNvPr id="3" name="deckgen:decor"/>
           <p:cNvSpPr/>
           <p:nvPr/>
         </p:nvSpPr>
@@ -10661,7 +10922,7 @@
       </p:sp>
       <p:sp>
         <p:nvSpPr>
-          <p:cNvPr id="4" name="Oval 3"/>
+          <p:cNvPr id="4" name="deckgen:decor"/>
           <p:cNvSpPr/>
           <p:nvPr/>
         </p:nvSpPr>
@@ -10983,7 +11244,7 @@
                 <a:ea typeface="Pretendard"/>
                 <a:cs typeface="Pretendard"/>
               </a:rPr>
-              <a:t>ERROR 1452</a:t>
+              <a:t>ERROR 1452 (23000)</a:t>
             </a:r>
           </a:p>
         </p:txBody>
@@ -11054,7 +11315,7 @@
                 <a:ea typeface="Pretendard"/>
                 <a:cs typeface="Pretendard"/>
               </a:rPr>
-              <a:t>foreign key constraint fails</a:t>
+              <a:t>a foreign key constraint fails</a:t>
             </a:r>
           </a:p>
         </p:txBody>
@@ -11125,7 +11386,7 @@
                 <a:ea typeface="Pretendard"/>
                 <a:cs typeface="Pretendard"/>
               </a:rPr>
-              <a:t>부모가 없는데 자식을 넣으려 함</a:t>
+              <a:t>부모 없는 자식 — 실패해도 번호 하나는 쓴다</a:t>
             </a:r>
           </a:p>
         </p:txBody>
@@ -11662,7 +11923,7 @@
       <p:grpSpPr/>
       <p:sp>
         <p:nvSpPr>
-          <p:cNvPr id="2" name="Oval 1"/>
+          <p:cNvPr id="2" name="deckgen:decor"/>
           <p:cNvSpPr/>
           <p:nvPr/>
         </p:nvSpPr>
@@ -11692,7 +11953,7 @@
       </p:sp>
       <p:sp>
         <p:nvSpPr>
-          <p:cNvPr id="3" name="Oval 2"/>
+          <p:cNvPr id="3" name="deckgen:decor"/>
           <p:cNvSpPr/>
           <p:nvPr/>
         </p:nvSpPr>
@@ -11722,7 +11983,7 @@
       </p:sp>
       <p:sp>
         <p:nvSpPr>
-          <p:cNvPr id="4" name="Oval 3"/>
+          <p:cNvPr id="4" name="deckgen:decor"/>
           <p:cNvSpPr/>
           <p:nvPr/>
         </p:nvSpPr>
@@ -12115,7 +12376,7 @@
                 <a:ea typeface="Pretendard"/>
                 <a:cs typeface="Pretendard"/>
               </a:rPr>
-              <a:t>「무선마우스」까지 잘못 잡힌다</a:t>
+              <a:t>글자를 뒤져야 센다 — 이름이 바뀌면 깨진다</a:t>
             </a:r>
           </a:p>
         </p:txBody>
@@ -12444,7 +12705,7 @@
                 <a:ea typeface="Pretendard"/>
                 <a:cs typeface="Pretendard"/>
               </a:rPr>
-              <a:t>COUNT(DISTINCT o.id) — 조인 뒤 부풀림 방지</a:t>
+              <a:t>COUNT(o.id) 면 김하나 3 — DISTINCT 로 2</a:t>
             </a:r>
           </a:p>
         </p:txBody>
@@ -12652,7 +12913,7 @@
       <p:grpSpPr/>
       <p:sp>
         <p:nvSpPr>
-          <p:cNvPr id="2" name="Oval 1"/>
+          <p:cNvPr id="2" name="deckgen:decor"/>
           <p:cNvSpPr/>
           <p:nvPr/>
         </p:nvSpPr>
@@ -12682,7 +12943,7 @@
       </p:sp>
       <p:sp>
         <p:nvSpPr>
-          <p:cNvPr id="3" name="Oval 2"/>
+          <p:cNvPr id="3" name="deckgen:decor"/>
           <p:cNvSpPr/>
           <p:nvPr/>
         </p:nvSpPr>
@@ -12712,7 +12973,7 @@
       </p:sp>
       <p:sp>
         <p:nvSpPr>
-          <p:cNvPr id="4" name="Oval 3"/>
+          <p:cNvPr id="4" name="deckgen:decor"/>
           <p:cNvSpPr/>
           <p:nvPr/>
         </p:nvSpPr>
@@ -13279,7 +13540,7 @@
                 <a:ea typeface="Pretendard"/>
                 <a:cs typeface="Pretendard"/>
               </a:rPr>
-              <a:t>fk_orders_customer · fk_items_order · fk_items_product</a:t>
+              <a:t>fk_items_order · fk_items_product · fk_orders_customer</a:t>
             </a:r>
           </a:p>
         </p:txBody>
@@ -13423,7 +13684,7 @@
                 <a:ea typeface="Pretendard"/>
                 <a:cs typeface="Pretendard"/>
               </a:rPr>
-              <a:t>SHOW KEYS FROM order_items WHERE Key_name = 'PRIMARY'</a:t>
+              <a:t>information_schema.statistics — index_name = 'PRIMARY'</a:t>
             </a:r>
           </a:p>
         </p:txBody>
@@ -13567,7 +13828,7 @@
                 <a:ea typeface="Pretendard"/>
                 <a:cs typeface="Pretendard"/>
               </a:rPr>
-              <a:t>order_id · product_id 두 행</a:t>
+              <a:t>1 order_id · 2 product_id — 열 제목은 대문자로 나온다</a:t>
             </a:r>
           </a:p>
         </p:txBody>
@@ -13745,7 +14006,7 @@
       <p:grpSpPr/>
       <p:sp>
         <p:nvSpPr>
-          <p:cNvPr id="2" name="Oval 1"/>
+          <p:cNvPr id="2" name="deckgen:decor"/>
           <p:cNvSpPr/>
           <p:nvPr/>
         </p:nvSpPr>
@@ -13775,7 +14036,7 @@
       </p:sp>
       <p:sp>
         <p:nvSpPr>
-          <p:cNvPr id="3" name="Oval 2"/>
+          <p:cNvPr id="3" name="deckgen:decor"/>
           <p:cNvSpPr/>
           <p:nvPr/>
         </p:nvSpPr>
@@ -13805,7 +14066,7 @@
       </p:sp>
       <p:sp>
         <p:nvSpPr>
-          <p:cNvPr id="4" name="Oval 3"/>
+          <p:cNvPr id="4" name="deckgen:decor"/>
           <p:cNvSpPr/>
           <p:nvPr/>
         </p:nvSpPr>
